--- a/07_presentation/Diagnosis_Keterlambatan_Pengiriman_Olist.pptx
+++ b/07_presentation/Diagnosis_Keterlambatan_Pengiriman_Olist.pptx
@@ -122,6 +122,157 @@
     </p:ext>
   </p:extLst>
 </p:presentation>
+</file>
+
+<file path=ppt/changesInfos/changesInfo1.xml><?xml version="1.0" encoding="utf-8"?>
+<pc:chgInfo xmlns:a="http://schemas.openxmlformats.org/drawingml/2006/main" xmlns:r="http://schemas.openxmlformats.org/officeDocument/2006/relationships" xmlns:ac="http://schemas.microsoft.com/office/drawing/2013/main/command" xmlns:pc="http://schemas.microsoft.com/office/powerpoint/2013/main/command">
+  <pc:docChgLst>
+    <pc:chgData name="msi bravo" userId="161362f8529bc145" providerId="LiveId" clId="{63EF0039-CC50-4603-BAC1-0069894D0085}"/>
+    <pc:docChg chg="undo custSel modSld">
+      <pc:chgData name="msi bravo" userId="161362f8529bc145" providerId="LiveId" clId="{63EF0039-CC50-4603-BAC1-0069894D0085}" dt="2026-09-07T07:15:39.985" v="129" actId="478"/>
+      <pc:docMkLst>
+        <pc:docMk/>
+      </pc:docMkLst>
+      <pc:sldChg chg="addSp delSp modSp mod">
+        <pc:chgData name="msi bravo" userId="161362f8529bc145" providerId="LiveId" clId="{63EF0039-CC50-4603-BAC1-0069894D0085}" dt="2026-09-07T07:15:10.713" v="127" actId="478"/>
+        <pc:sldMkLst>
+          <pc:docMk/>
+          <pc:sldMk cId="0" sldId="257"/>
+        </pc:sldMkLst>
+        <pc:picChg chg="del mod">
+          <ac:chgData name="msi bravo" userId="161362f8529bc145" providerId="LiveId" clId="{63EF0039-CC50-4603-BAC1-0069894D0085}" dt="2026-09-07T07:05:06.998" v="2" actId="478"/>
+          <ac:picMkLst>
+            <pc:docMk/>
+            <pc:sldMk cId="0" sldId="257"/>
+            <ac:picMk id="36" creationId="{10B19DFC-FDA9-153D-4463-3684674477D2}"/>
+          </ac:picMkLst>
+        </pc:picChg>
+        <pc:picChg chg="add del mod ord">
+          <ac:chgData name="msi bravo" userId="161362f8529bc145" providerId="LiveId" clId="{63EF0039-CC50-4603-BAC1-0069894D0085}" dt="2026-09-07T07:15:10.713" v="127" actId="478"/>
+          <ac:picMkLst>
+            <pc:docMk/>
+            <pc:sldMk cId="0" sldId="257"/>
+            <ac:picMk id="37" creationId="{9DCC67C9-1B49-C8C2-63DC-A92F6A0A7926}"/>
+          </ac:picMkLst>
+        </pc:picChg>
+      </pc:sldChg>
+      <pc:sldChg chg="addSp delSp modSp mod">
+        <pc:chgData name="msi bravo" userId="161362f8529bc145" providerId="LiveId" clId="{63EF0039-CC50-4603-BAC1-0069894D0085}" dt="2026-09-07T07:15:06.882" v="126" actId="478"/>
+        <pc:sldMkLst>
+          <pc:docMk/>
+          <pc:sldMk cId="0" sldId="258"/>
+        </pc:sldMkLst>
+        <pc:picChg chg="add del mod ord">
+          <ac:chgData name="msi bravo" userId="161362f8529bc145" providerId="LiveId" clId="{63EF0039-CC50-4603-BAC1-0069894D0085}" dt="2026-09-07T07:15:06.882" v="126" actId="478"/>
+          <ac:picMkLst>
+            <pc:docMk/>
+            <pc:sldMk cId="0" sldId="258"/>
+            <ac:picMk id="10" creationId="{112BD6E9-EC95-68E6-246C-73247C98977B}"/>
+          </ac:picMkLst>
+        </pc:picChg>
+        <pc:picChg chg="del">
+          <ac:chgData name="msi bravo" userId="161362f8529bc145" providerId="LiveId" clId="{63EF0039-CC50-4603-BAC1-0069894D0085}" dt="2026-09-07T07:05:09.877" v="3" actId="478"/>
+          <ac:picMkLst>
+            <pc:docMk/>
+            <pc:sldMk cId="0" sldId="258"/>
+            <ac:picMk id="13" creationId="{9F7FB11D-46C7-A01C-2C88-DE275EA982D5}"/>
+          </ac:picMkLst>
+        </pc:picChg>
+      </pc:sldChg>
+      <pc:sldChg chg="addSp delSp modSp mod">
+        <pc:chgData name="msi bravo" userId="161362f8529bc145" providerId="LiveId" clId="{63EF0039-CC50-4603-BAC1-0069894D0085}" dt="2026-09-07T07:14:59.639" v="125" actId="478"/>
+        <pc:sldMkLst>
+          <pc:docMk/>
+          <pc:sldMk cId="0" sldId="259"/>
+        </pc:sldMkLst>
+        <pc:picChg chg="add del mod ord">
+          <ac:chgData name="msi bravo" userId="161362f8529bc145" providerId="LiveId" clId="{63EF0039-CC50-4603-BAC1-0069894D0085}" dt="2026-09-07T07:09:58.834" v="106" actId="478"/>
+          <ac:picMkLst>
+            <pc:docMk/>
+            <pc:sldMk cId="0" sldId="259"/>
+            <ac:picMk id="19" creationId="{112856AA-64F7-3A3F-AE96-7964ECDB4197}"/>
+          </ac:picMkLst>
+        </pc:picChg>
+        <pc:picChg chg="del">
+          <ac:chgData name="msi bravo" userId="161362f8529bc145" providerId="LiveId" clId="{63EF0039-CC50-4603-BAC1-0069894D0085}" dt="2026-09-07T07:05:12.159" v="4" actId="478"/>
+          <ac:picMkLst>
+            <pc:docMk/>
+            <pc:sldMk cId="0" sldId="259"/>
+            <ac:picMk id="20" creationId="{E32853B0-6549-E1A7-3BA8-B814D502C662}"/>
+          </ac:picMkLst>
+        </pc:picChg>
+        <pc:picChg chg="add del mod ord">
+          <ac:chgData name="msi bravo" userId="161362f8529bc145" providerId="LiveId" clId="{63EF0039-CC50-4603-BAC1-0069894D0085}" dt="2026-09-07T07:14:59.639" v="125" actId="478"/>
+          <ac:picMkLst>
+            <pc:docMk/>
+            <pc:sldMk cId="0" sldId="259"/>
+            <ac:picMk id="22" creationId="{81FBD400-CE4A-75B8-57A2-B2397A8C68C3}"/>
+          </ac:picMkLst>
+        </pc:picChg>
+      </pc:sldChg>
+      <pc:sldChg chg="addSp delSp modSp mod">
+        <pc:chgData name="msi bravo" userId="161362f8529bc145" providerId="LiveId" clId="{63EF0039-CC50-4603-BAC1-0069894D0085}" dt="2026-09-07T07:15:34.683" v="128" actId="478"/>
+        <pc:sldMkLst>
+          <pc:docMk/>
+          <pc:sldMk cId="0" sldId="260"/>
+        </pc:sldMkLst>
+        <pc:picChg chg="add del mod">
+          <ac:chgData name="msi bravo" userId="161362f8529bc145" providerId="LiveId" clId="{63EF0039-CC50-4603-BAC1-0069894D0085}" dt="2026-09-07T07:15:34.683" v="128" actId="478"/>
+          <ac:picMkLst>
+            <pc:docMk/>
+            <pc:sldMk cId="0" sldId="260"/>
+            <ac:picMk id="31" creationId="{DE5C0D47-002B-D5DC-2C7E-5AFBE9C7446A}"/>
+          </ac:picMkLst>
+        </pc:picChg>
+      </pc:sldChg>
+      <pc:sldChg chg="addSp delSp modSp mod">
+        <pc:chgData name="msi bravo" userId="161362f8529bc145" providerId="LiveId" clId="{63EF0039-CC50-4603-BAC1-0069894D0085}" dt="2026-09-07T07:15:39.985" v="129" actId="478"/>
+        <pc:sldMkLst>
+          <pc:docMk/>
+          <pc:sldMk cId="0" sldId="265"/>
+        </pc:sldMkLst>
+        <pc:picChg chg="add del mod">
+          <ac:chgData name="msi bravo" userId="161362f8529bc145" providerId="LiveId" clId="{63EF0039-CC50-4603-BAC1-0069894D0085}" dt="2026-09-07T07:15:39.985" v="129" actId="478"/>
+          <ac:picMkLst>
+            <pc:docMk/>
+            <pc:sldMk cId="0" sldId="265"/>
+            <ac:picMk id="28" creationId="{13C941EE-064C-2849-6BF5-46A8CA4BDEFB}"/>
+          </ac:picMkLst>
+        </pc:picChg>
+      </pc:sldChg>
+      <pc:sldChg chg="delSp mod">
+        <pc:chgData name="msi bravo" userId="161362f8529bc145" providerId="LiveId" clId="{63EF0039-CC50-4603-BAC1-0069894D0085}" dt="2026-09-07T07:14:52.552" v="124" actId="478"/>
+        <pc:sldMkLst>
+          <pc:docMk/>
+          <pc:sldMk cId="0" sldId="266"/>
+        </pc:sldMkLst>
+        <pc:picChg chg="del">
+          <ac:chgData name="msi bravo" userId="161362f8529bc145" providerId="LiveId" clId="{63EF0039-CC50-4603-BAC1-0069894D0085}" dt="2026-09-07T07:14:52.552" v="124" actId="478"/>
+          <ac:picMkLst>
+            <pc:docMk/>
+            <pc:sldMk cId="0" sldId="266"/>
+            <ac:picMk id="18" creationId="{76166B97-CB10-243C-AFD1-2FF740E8A003}"/>
+          </ac:picMkLst>
+        </pc:picChg>
+      </pc:sldChg>
+      <pc:sldChg chg="delSp mod">
+        <pc:chgData name="msi bravo" userId="161362f8529bc145" providerId="LiveId" clId="{63EF0039-CC50-4603-BAC1-0069894D0085}" dt="2026-09-07T07:14:49.390" v="123" actId="478"/>
+        <pc:sldMkLst>
+          <pc:docMk/>
+          <pc:sldMk cId="0" sldId="267"/>
+        </pc:sldMkLst>
+        <pc:picChg chg="del">
+          <ac:chgData name="msi bravo" userId="161362f8529bc145" providerId="LiveId" clId="{63EF0039-CC50-4603-BAC1-0069894D0085}" dt="2026-09-07T07:14:49.390" v="123" actId="478"/>
+          <ac:picMkLst>
+            <pc:docMk/>
+            <pc:sldMk cId="0" sldId="267"/>
+            <ac:picMk id="30" creationId="{F8F6AF05-6A8F-12CE-683E-B42CFC3B9DA3}"/>
+          </ac:picMkLst>
+        </pc:picChg>
+      </pc:sldChg>
+    </pc:docChg>
+  </pc:docChgLst>
+</pc:chgInfo>
 </file>
 
 <file path=ppt/charts/chart1.xml><?xml version="1.0" encoding="utf-8"?>
@@ -3801,36 +3952,6 @@
           <a:chExt cx="0" cy="0"/>
         </a:xfrm>
       </p:grpSpPr>
-      <p:pic>
-        <p:nvPicPr>
-          <p:cNvPr id="18" name="Image 0" descr="assets/box_light.png">
-            <a:extLst>
-              <a:ext uri="{FF2B5EF4-FFF2-40B4-BE49-F238E27FC236}">
-                <a16:creationId xmlns:a16="http://schemas.microsoft.com/office/drawing/2014/main" id="{76166B97-CB10-243C-AFD1-2FF740E8A003}"/>
-              </a:ext>
-            </a:extLst>
-          </p:cNvPr>
-          <p:cNvPicPr>
-            <a:picLocks noChangeAspect="1"/>
-          </p:cNvPicPr>
-          <p:nvPr/>
-        </p:nvPicPr>
-        <p:blipFill>
-          <a:blip r:embed="rId3"/>
-          <a:stretch>
-            <a:fillRect/>
-          </a:stretch>
-        </p:blipFill>
-        <p:spPr>
-          <a:xfrm>
-            <a:off x="0" y="-6134424"/>
-            <a:ext cx="12192000" cy="12992424"/>
-          </a:xfrm>
-          <a:prstGeom prst="rect">
-            <a:avLst/>
-          </a:prstGeom>
-        </p:spPr>
-      </p:pic>
       <p:sp>
         <p:nvSpPr>
           <p:cNvPr id="2" name="Text 0"/>
@@ -5825,36 +5946,6 @@
           <a:chExt cx="0" cy="0"/>
         </a:xfrm>
       </p:grpSpPr>
-      <p:pic>
-        <p:nvPicPr>
-          <p:cNvPr id="30" name="Image 0" descr="assets/box_light.png">
-            <a:extLst>
-              <a:ext uri="{FF2B5EF4-FFF2-40B4-BE49-F238E27FC236}">
-                <a16:creationId xmlns:a16="http://schemas.microsoft.com/office/drawing/2014/main" id="{F8F6AF05-6A8F-12CE-683E-B42CFC3B9DA3}"/>
-              </a:ext>
-            </a:extLst>
-          </p:cNvPr>
-          <p:cNvPicPr>
-            <a:picLocks noChangeAspect="1"/>
-          </p:cNvPicPr>
-          <p:nvPr/>
-        </p:nvPicPr>
-        <p:blipFill>
-          <a:blip r:embed="rId3"/>
-          <a:stretch>
-            <a:fillRect/>
-          </a:stretch>
-        </p:blipFill>
-        <p:spPr>
-          <a:xfrm>
-            <a:off x="461172" y="2670048"/>
-            <a:ext cx="11269656" cy="11269656"/>
-          </a:xfrm>
-          <a:prstGeom prst="rect">
-            <a:avLst/>
-          </a:prstGeom>
-        </p:spPr>
-      </p:pic>
       <p:sp>
         <p:nvSpPr>
           <p:cNvPr id="2" name="Text 0"/>
@@ -8135,36 +8226,6 @@
           <a:chExt cx="0" cy="0"/>
         </a:xfrm>
       </p:grpSpPr>
-      <p:pic>
-        <p:nvPicPr>
-          <p:cNvPr id="36" name="Image 0" descr="assets/box_light.png">
-            <a:extLst>
-              <a:ext uri="{FF2B5EF4-FFF2-40B4-BE49-F238E27FC236}">
-                <a16:creationId xmlns:a16="http://schemas.microsoft.com/office/drawing/2014/main" id="{10B19DFC-FDA9-153D-4463-3684674477D2}"/>
-              </a:ext>
-            </a:extLst>
-          </p:cNvPr>
-          <p:cNvPicPr>
-            <a:picLocks noChangeAspect="1"/>
-          </p:cNvPicPr>
-          <p:nvPr/>
-        </p:nvPicPr>
-        <p:blipFill>
-          <a:blip r:embed="rId3"/>
-          <a:stretch>
-            <a:fillRect/>
-          </a:stretch>
-        </p:blipFill>
-        <p:spPr>
-          <a:xfrm>
-            <a:off x="3513834" y="2788920"/>
-            <a:ext cx="5164333" cy="5583947"/>
-          </a:xfrm>
-          <a:prstGeom prst="rect">
-            <a:avLst/>
-          </a:prstGeom>
-        </p:spPr>
-      </p:pic>
       <p:sp>
         <p:nvSpPr>
           <p:cNvPr id="2" name="Text 0"/>
@@ -9461,7 +9522,7 @@
           <p:nvPr/>
         </p:nvPicPr>
         <p:blipFill>
-          <a:blip r:embed="rId4">
+          <a:blip r:embed="rId3">
             <a:alphaModFix amt="85000"/>
           </a:blip>
           <a:stretch>
@@ -9562,36 +9623,6 @@
           <a:chExt cx="0" cy="0"/>
         </a:xfrm>
       </p:grpSpPr>
-      <p:pic>
-        <p:nvPicPr>
-          <p:cNvPr id="13" name="Image 0" descr="assets/box_light.png">
-            <a:extLst>
-              <a:ext uri="{FF2B5EF4-FFF2-40B4-BE49-F238E27FC236}">
-                <a16:creationId xmlns:a16="http://schemas.microsoft.com/office/drawing/2014/main" id="{9F7FB11D-46C7-A01C-2C88-DE275EA982D5}"/>
-              </a:ext>
-            </a:extLst>
-          </p:cNvPr>
-          <p:cNvPicPr>
-            <a:picLocks noChangeAspect="1"/>
-          </p:cNvPicPr>
-          <p:nvPr/>
-        </p:nvPicPr>
-        <p:blipFill>
-          <a:blip r:embed="rId3"/>
-          <a:stretch>
-            <a:fillRect/>
-          </a:stretch>
-        </p:blipFill>
-        <p:spPr>
-          <a:xfrm>
-            <a:off x="-10112792" y="5989320"/>
-            <a:ext cx="18515813" cy="5757773"/>
-          </a:xfrm>
-          <a:prstGeom prst="rect">
-            <a:avLst/>
-          </a:prstGeom>
-        </p:spPr>
-      </p:pic>
       <p:sp>
         <p:nvSpPr>
           <p:cNvPr id="2" name="Text 0"/>
@@ -10817,7 +10848,7 @@
           <p:nvPr/>
         </p:nvPicPr>
         <p:blipFill>
-          <a:blip r:embed="rId4">
+          <a:blip r:embed="rId3">
             <a:alphaModFix amt="85000"/>
           </a:blip>
           <a:stretch>
@@ -10918,36 +10949,6 @@
           <a:chExt cx="0" cy="0"/>
         </a:xfrm>
       </p:grpSpPr>
-      <p:pic>
-        <p:nvPicPr>
-          <p:cNvPr id="20" name="Image 0" descr="assets/box_light.png">
-            <a:extLst>
-              <a:ext uri="{FF2B5EF4-FFF2-40B4-BE49-F238E27FC236}">
-                <a16:creationId xmlns:a16="http://schemas.microsoft.com/office/drawing/2014/main" id="{E32853B0-6549-E1A7-3BA8-B814D502C662}"/>
-              </a:ext>
-            </a:extLst>
-          </p:cNvPr>
-          <p:cNvPicPr>
-            <a:picLocks noChangeAspect="1"/>
-          </p:cNvPicPr>
-          <p:nvPr/>
-        </p:nvPicPr>
-        <p:blipFill>
-          <a:blip r:embed="rId3"/>
-          <a:stretch>
-            <a:fillRect/>
-          </a:stretch>
-        </p:blipFill>
-        <p:spPr>
-          <a:xfrm>
-            <a:off x="0" y="-5720186"/>
-            <a:ext cx="12192000" cy="12578186"/>
-          </a:xfrm>
-          <a:prstGeom prst="rect">
-            <a:avLst/>
-          </a:prstGeom>
-        </p:spPr>
-      </p:pic>
       <p:sp>
         <p:nvSpPr>
           <p:cNvPr id="2" name="Text 0"/>
